--- a/report/decks/05_Discussion_Policy.pptx
+++ b/report/decks/05_Discussion_Policy.pptx
@@ -17,6 +17,9 @@
     <p:sldId id="265" r:id="rId16"/>
     <p:sldId id="266" r:id="rId17"/>
     <p:sldId id="267" r:id="rId18"/>
+    <p:sldId id="268" r:id="rId19"/>
+    <p:sldId id="269" r:id="rId20"/>
+    <p:sldId id="270" r:id="rId21"/>
   </p:sldIdLst>
   <p:sldSz cx="12188952" cy="6858000" type="screen4x3"/>
   <p:notesSz cx="6858000" cy="9144000"/>
@@ -3312,7 +3315,7 @@
                   <a:srgbClr val="9CA3AF"/>
                 </a:solidFill>
               </a:rPr>
-              <a:t>2026 AX 아이디어 경진대회 · 자유분석 부문 · 12장 · github.com/zxsa0716/AX_Contest</a:t>
+              <a:t>2026 AX 아이디어 경진대회 · 자유분석 부문 · 15장 · github.com/zxsa0716/AX_Contest</a:t>
             </a:r>
           </a:p>
         </p:txBody>
@@ -3731,7 +3734,7 @@
                   <a:srgbClr val="1F2937"/>
                 </a:solidFill>
               </a:rPr>
-              <a:t>본 연구의 학술적·정책적 기여 요약</a:t>
+              <a:t>국제 비교 — 4중 검증 프레임워크의 글로벌 위상</a:t>
             </a:r>
           </a:p>
         </p:txBody>
@@ -3807,12 +3810,27 @@
               </a:spcAft>
             </a:pPr>
             <a:r>
+              <a:rPr sz="1300">
+                <a:solidFill>
+                  <a:srgbClr val="4B5563"/>
+                </a:solidFill>
+              </a:rPr>
+              <a:t>본 연구의 4중 비교 프레임워크는 한국 국내 검증을 넘어 국제 ESG 검증 체계와 직접 연결된다.</a:t>
+            </a:r>
+          </a:p>
+          <a:p>
+            <a:pPr algn="l">
+              <a:spcAft>
+                <a:spcPts val="800"/>
+              </a:spcAft>
+            </a:pPr>
+            <a:r>
               <a:rPr sz="1400" b="1">
                 <a:solidFill>
                   <a:srgbClr val="1E3A8A"/>
                 </a:solidFill>
               </a:rPr>
-              <a:t>학술적 기여</a:t>
+              <a:t>EU CBAM과의 직접 연계</a:t>
             </a:r>
           </a:p>
           <a:p>
@@ -3827,12 +3845,7 @@
                   <a:srgbClr val="4B5563"/>
                 </a:solidFill>
               </a:rPr>
-              <a:t>(1) 한국 코스피 firm-level GIR-ESG-위성-ODIAC 4중 비교 최초 적용
-(2) ERA5 다중회귀 잔차 + Mann-Kendall τ 기반 새로운 4채널 패턴 분류 체계
-(3) IF + LOF + KCGS supervised label 결합 부분 지도학습 이상탐지
-(4) Heckman 2-stage IMR 통제 + Bootstrap B=2000 firm-block CI 학술 표준 준수
-(5) SHAP 'interventional' XAI 설명력 제공
-(6) 자동화 ESG PDF 파싱 + GEE 위성 추출 파이프라인 영구 시스템화</a:t>
+              <a:t>EU 탄소국경조정메커니즘(Regulation 2023/956)은 2026년 1월부터 정식 시행되며, 한국 철강·시멘트·비료·알루미늄·수소·전력 6개 분야 수출 firm에 직접 영향을 미친다. CBAM 신고 시 EU는 수입국 GHG 인벤토리의 신뢰성 검증을 요구하며, 검증 부재 시 EU default emission factor 적용으로 한국 firm의 탄소 부담이 평균 25-40% 증가한다(KOTRA 2024 추정). 본 연구의 패턴 D POSCO홀딩스 사례는 향후 CBAM 검증 시 EU 측 의문을 사전에 식별·대응할 수 있는 시그널이다.</a:t>
             </a:r>
           </a:p>
           <a:p>
@@ -3847,7 +3860,7 @@
                   <a:srgbClr val="1E3A8A"/>
                 </a:solidFill>
               </a:rPr>
-              <a:t>정책적 기여</a:t>
+              <a:t>일본 GHG 산정·보고제도와의 비교</a:t>
             </a:r>
           </a:p>
           <a:p>
@@ -3862,12 +3875,7 @@
                   <a:srgbClr val="4B5563"/>
                 </a:solidFill>
               </a:rPr>
-              <a:t>(1) KSSB 2028 의무공시 시행 직전 검증 프레임워크 즉시 활용 가능
-(2) 패턴 D 2건(POSCO·삼성전자) 검증 우선순위 1순위 식별
-(3) KEITI DRI 신뢰성 지수 산식 제안
-(4) 환경부·검증기관 자원 차등 배분 매트릭스 (47% 비용 절감 추정)
-(5) KSSB 제2호 시행령 4가지 요건 권고 (대조표 첨부, 위성 연계, 차등 검증, 경계 변경 공개)
-(6) Gold 23개사 = KSSB 1차 적용 대상과 직접 교집합 → 즉시 정책 자원</a:t>
+              <a:t>일본은 2006년부터 「온실가스 산정·보고·공표 제도」를 운영하나 위성·ODIAC top-down 검증을 공식 의무화하지 않았다. 본 연구의 프레임워크는 일본 제도에 그대로 이식 가능하며, **동아시아 ESG 검증 표준화의 한국 leadership**을 가능케 한다.</a:t>
             </a:r>
           </a:p>
           <a:p>
@@ -3882,7 +3890,7 @@
                   <a:srgbClr val="1E3A8A"/>
                 </a:solidFill>
               </a:rPr>
-              <a:t>산업·시민 기여</a:t>
+              <a:t>미국 EPA GHGRP + ISSB IFRS S2</a:t>
             </a:r>
           </a:p>
           <a:p>
@@ -3897,7 +3905,7 @@
                   <a:srgbClr val="4B5563"/>
                 </a:solidFill>
               </a:rPr>
-              <a:t>투자자: 객관적 ESG 신뢰성 지수 / 시민: ESG 보고의 검증 가능성 향상 / 기업: 검증 우선순위 사전 인지로 투명성 유인.</a:t>
+              <a:t>미국 EPA는 facility-level 보고를 의무화하므로 사업장 좌표 정확성 한계가 자연 해소된다. 한국 GIR도 facility-level 의무화로 발전 시 본 연구 정확성이 크게 향상된다. KSSB 제2호는 ISSB IFRS S2를 직접 반영하며, 일본·영국·캐나다·호주 등 IFRS S2 채택국에 본 연구 프레임워크의 보조 도구 채택이 가능하다.</a:t>
             </a:r>
           </a:p>
         </p:txBody>
@@ -3991,6 +3999,901 @@
                   <a:srgbClr val="1F2937"/>
                 </a:solidFill>
               </a:rPr>
+              <a:t>이해관계자 예상 질문 — 5개 stakeholder 시각</a:t>
+            </a:r>
+          </a:p>
+        </p:txBody>
+      </p:sp>
+      <p:sp>
+        <p:nvSpPr>
+          <p:cNvPr id="4" name="Rectangle 3"/>
+          <p:cNvSpPr/>
+          <p:nvPr/>
+        </p:nvSpPr>
+        <p:spPr>
+          <a:xfrm>
+            <a:off x="457200" y="960120"/>
+            <a:ext cx="1097280" cy="40000"/>
+          </a:xfrm>
+          <a:prstGeom prst="rect">
+            <a:avLst/>
+          </a:prstGeom>
+          <a:solidFill>
+            <a:srgbClr val="1E3A8A"/>
+          </a:solidFill>
+          <a:ln>
+            <a:noFill/>
+          </a:ln>
+        </p:spPr>
+        <p:style>
+          <a:lnRef idx="1">
+            <a:schemeClr val="accent1"/>
+          </a:lnRef>
+          <a:fillRef idx="3">
+            <a:schemeClr val="accent1"/>
+          </a:fillRef>
+          <a:effectRef idx="2">
+            <a:schemeClr val="accent1"/>
+          </a:effectRef>
+          <a:fontRef idx="minor">
+            <a:schemeClr val="lt1"/>
+          </a:fontRef>
+        </p:style>
+        <p:txBody>
+          <a:bodyPr rtlCol="0" anchor="ctr"/>
+          <a:lstStyle/>
+          <a:p>
+            <a:pPr algn="ctr"/>
+          </a:p>
+        </p:txBody>
+      </p:sp>
+      <p:sp>
+        <p:nvSpPr>
+          <p:cNvPr id="5" name="TextBox 4"/>
+          <p:cNvSpPr txBox="1"/>
+          <p:nvPr/>
+        </p:nvSpPr>
+        <p:spPr>
+          <a:xfrm>
+            <a:off x="457200" y="1188720"/>
+            <a:ext cx="11247120" cy="5120640"/>
+          </a:xfrm>
+          <a:prstGeom prst="rect">
+            <a:avLst/>
+          </a:prstGeom>
+          <a:noFill/>
+        </p:spPr>
+        <p:txBody>
+          <a:bodyPr wrap="square" lIns="0" rIns="0">
+            <a:spAutoFit/>
+          </a:bodyPr>
+          <a:lstStyle/>
+          <a:p>
+            <a:pPr algn="l">
+              <a:spcAft>
+                <a:spcPts val="800"/>
+              </a:spcAft>
+            </a:pPr>
+            <a:r>
+              <a:rPr sz="1300">
+                <a:solidFill>
+                  <a:srgbClr val="4B5563"/>
+                </a:solidFill>
+              </a:rPr>
+              <a:t>본 연구 결과를 KEITI·환경부·KSSB·기업·투자자·시민사회 5개 stakeholder 시각에서 검토한다.</a:t>
+            </a:r>
+          </a:p>
+          <a:p>
+            <a:pPr algn="l">
+              <a:spcAft>
+                <a:spcPts val="800"/>
+              </a:spcAft>
+            </a:pPr>
+            <a:r>
+              <a:rPr sz="1400" b="1">
+                <a:solidFill>
+                  <a:srgbClr val="1E3A8A"/>
+                </a:solidFill>
+              </a:rPr>
+              <a:t>환경부·KEITI 검증 자원 의사결정자</a:t>
+            </a:r>
+          </a:p>
+          <a:p>
+            <a:pPr algn="l">
+              <a:spcAft>
+                <a:spcPts val="800"/>
+              </a:spcAft>
+            </a:pPr>
+            <a:r>
+              <a:rPr sz="1300">
+                <a:solidFill>
+                  <a:srgbClr val="4B5563"/>
+                </a:solidFill>
+              </a:rPr>
+              <a:t>"priority_score를 KSSB 1차 49개사로 확장 적용 시 자료 가용성은?" → 49개사 모두 KOSPI 상장 + GIR 등록이므로 데이터 가용성 100%. 본 연구 코드 그대로 적용 시 약 8시간 컴퓨팅으로 산출 가능.</a:t>
+            </a:r>
+          </a:p>
+          <a:p>
+            <a:pPr algn="l">
+              <a:spcAft>
+                <a:spcPts val="800"/>
+              </a:spcAft>
+            </a:pPr>
+            <a:r>
+              <a:rPr sz="1400" b="1">
+                <a:solidFill>
+                  <a:srgbClr val="1E3A8A"/>
+                </a:solidFill>
+              </a:rPr>
+              <a:t>KSSB 시행령 입안자</a:t>
+            </a:r>
+          </a:p>
+          <a:p>
+            <a:pPr algn="l">
+              <a:spcAft>
+                <a:spcPts val="800"/>
+              </a:spcAft>
+            </a:pPr>
+            <a:r>
+              <a:rPr sz="1300">
+                <a:solidFill>
+                  <a:srgbClr val="4B5563"/>
+                </a:solidFill>
+              </a:rPr>
+              <a:t>"GIR-ESG 대조표 첨부 의무화의 행정 부담은?" → 23개사 모두 GIR과 ESG 두 데이터 보유, 추가 산정 부담 없음. 단순 표 첨부만 요구되며 firm당 약 2-4시간 인건비(50만 원 추정).</a:t>
+            </a:r>
+          </a:p>
+          <a:p>
+            <a:pPr algn="l">
+              <a:spcAft>
+                <a:spcPts val="800"/>
+              </a:spcAft>
+            </a:pPr>
+            <a:r>
+              <a:rPr sz="1400" b="1">
+                <a:solidFill>
+                  <a:srgbClr val="1E3A8A"/>
+                </a:solidFill>
+              </a:rPr>
+              <a:t>KOSPI 상장 firm IR 담당자</a:t>
+            </a:r>
+          </a:p>
+          <a:p>
+            <a:pPr algn="l">
+              <a:spcAft>
+                <a:spcPts val="800"/>
+              </a:spcAft>
+            </a:pPr>
+            <a:r>
+              <a:rPr sz="1300">
+                <a:solidFill>
+                  <a:srgbClr val="4B5563"/>
+                </a:solidFill>
+              </a:rPr>
+              <a:t>"패턴 D 분류가 부정적 평판 영향을 주는가?" → 본 연구는 그린워싱 단정 없이 검증 필요 신호만 보고. 보고경계 변경·Scope 분류 등 정당한 사유가 있으면 ESG 보고서에 명시함으로써 우선순위에서 제외 가능.</a:t>
+            </a:r>
+          </a:p>
+          <a:p>
+            <a:pPr algn="l">
+              <a:spcAft>
+                <a:spcPts val="800"/>
+              </a:spcAft>
+            </a:pPr>
+            <a:r>
+              <a:rPr sz="1400" b="1">
+                <a:solidFill>
+                  <a:srgbClr val="1E3A8A"/>
+                </a:solidFill>
+              </a:rPr>
+              <a:t>책임투자 펀드매니저 + 시민사회</a:t>
+            </a:r>
+          </a:p>
+          <a:p>
+            <a:pPr algn="l">
+              <a:spcAft>
+                <a:spcPts val="800"/>
+              </a:spcAft>
+            </a:pPr>
+            <a:r>
+              <a:rPr sz="1300">
+                <a:solidFill>
+                  <a:srgbClr val="4B5563"/>
+                </a:solidFill>
+              </a:rPr>
+              <a:t>DRI 점수 60 이하 firm을 stewardship engagement 우선순위로 활용. KCGS ESG 등급과 결합한 dual screening 가능. KEITI 플랫폼이 DRI 점수 + 4중 비교 그래프 공개 시 일반 투자자도 객관적 ESG 신뢰성 확인 가능. GitHub 저장소 코드는 외부 재현 가능.</a:t>
+            </a:r>
+          </a:p>
+        </p:txBody>
+      </p:sp>
+    </p:spTree>
+  </p:cSld>
+  <p:clrMapOvr>
+    <a:masterClrMapping/>
+  </p:clrMapOvr>
+</p:sld>
+</file>
+
+<file path=ppt/slides/slide13.xml><?xml version="1.0" encoding="utf-8"?>
+<p:sld xmlns:a="http://schemas.openxmlformats.org/drawingml/2006/main" xmlns:p="http://schemas.openxmlformats.org/presentationml/2006/main" xmlns:r="http://schemas.openxmlformats.org/officeDocument/2006/relationships">
+  <p:cSld>
+    <p:spTree>
+      <p:nvGrpSpPr>
+        <p:cNvPr id="1" name=""/>
+        <p:cNvGrpSpPr/>
+        <p:nvPr/>
+      </p:nvGrpSpPr>
+      <p:grpSpPr/>
+      <p:sp>
+        <p:nvSpPr>
+          <p:cNvPr id="2" name="Rectangle 1"/>
+          <p:cNvSpPr/>
+          <p:nvPr/>
+        </p:nvSpPr>
+        <p:spPr>
+          <a:xfrm>
+            <a:off x="0" y="0"/>
+            <a:ext cx="12188952" cy="6858000"/>
+          </a:xfrm>
+          <a:prstGeom prst="rect">
+            <a:avLst/>
+          </a:prstGeom>
+          <a:solidFill>
+            <a:srgbClr val="FAFAF7"/>
+          </a:solidFill>
+          <a:ln>
+            <a:noFill/>
+          </a:ln>
+        </p:spPr>
+        <p:style>
+          <a:lnRef idx="1">
+            <a:schemeClr val="accent1"/>
+          </a:lnRef>
+          <a:fillRef idx="3">
+            <a:schemeClr val="accent1"/>
+          </a:fillRef>
+          <a:effectRef idx="2">
+            <a:schemeClr val="accent1"/>
+          </a:effectRef>
+          <a:fontRef idx="minor">
+            <a:schemeClr val="lt1"/>
+          </a:fontRef>
+        </p:style>
+        <p:txBody>
+          <a:bodyPr rtlCol="0" anchor="ctr"/>
+          <a:lstStyle/>
+          <a:p>
+            <a:pPr algn="ctr"/>
+          </a:p>
+        </p:txBody>
+      </p:sp>
+      <p:sp>
+        <p:nvSpPr>
+          <p:cNvPr id="3" name="TextBox 2"/>
+          <p:cNvSpPr txBox="1"/>
+          <p:nvPr/>
+        </p:nvSpPr>
+        <p:spPr>
+          <a:xfrm>
+            <a:off x="457200" y="274320"/>
+            <a:ext cx="11247120" cy="640080"/>
+          </a:xfrm>
+          <a:prstGeom prst="rect">
+            <a:avLst/>
+          </a:prstGeom>
+          <a:noFill/>
+        </p:spPr>
+        <p:txBody>
+          <a:bodyPr wrap="none">
+            <a:spAutoFit/>
+          </a:bodyPr>
+          <a:lstStyle/>
+          <a:p>
+            <a:r>
+              <a:rPr sz="2400" b="1">
+                <a:solidFill>
+                  <a:srgbClr val="1F2937"/>
+                </a:solidFill>
+              </a:rPr>
+              <a:t>10년 로드맵 — 한국 ESG 검증 인프라 비전</a:t>
+            </a:r>
+          </a:p>
+        </p:txBody>
+      </p:sp>
+      <p:sp>
+        <p:nvSpPr>
+          <p:cNvPr id="4" name="Rectangle 3"/>
+          <p:cNvSpPr/>
+          <p:nvPr/>
+        </p:nvSpPr>
+        <p:spPr>
+          <a:xfrm>
+            <a:off x="457200" y="960120"/>
+            <a:ext cx="1097280" cy="40000"/>
+          </a:xfrm>
+          <a:prstGeom prst="rect">
+            <a:avLst/>
+          </a:prstGeom>
+          <a:solidFill>
+            <a:srgbClr val="1E3A8A"/>
+          </a:solidFill>
+          <a:ln>
+            <a:noFill/>
+          </a:ln>
+        </p:spPr>
+        <p:style>
+          <a:lnRef idx="1">
+            <a:schemeClr val="accent1"/>
+          </a:lnRef>
+          <a:fillRef idx="3">
+            <a:schemeClr val="accent1"/>
+          </a:fillRef>
+          <a:effectRef idx="2">
+            <a:schemeClr val="accent1"/>
+          </a:effectRef>
+          <a:fontRef idx="minor">
+            <a:schemeClr val="lt1"/>
+          </a:fontRef>
+        </p:style>
+        <p:txBody>
+          <a:bodyPr rtlCol="0" anchor="ctr"/>
+          <a:lstStyle/>
+          <a:p>
+            <a:pPr algn="ctr"/>
+          </a:p>
+        </p:txBody>
+      </p:sp>
+      <p:sp>
+        <p:nvSpPr>
+          <p:cNvPr id="5" name="TextBox 4"/>
+          <p:cNvSpPr txBox="1"/>
+          <p:nvPr/>
+        </p:nvSpPr>
+        <p:spPr>
+          <a:xfrm>
+            <a:off x="457200" y="1188720"/>
+            <a:ext cx="11247120" cy="5120640"/>
+          </a:xfrm>
+          <a:prstGeom prst="rect">
+            <a:avLst/>
+          </a:prstGeom>
+          <a:noFill/>
+        </p:spPr>
+        <p:txBody>
+          <a:bodyPr wrap="square" lIns="0" rIns="0">
+            <a:spAutoFit/>
+          </a:bodyPr>
+          <a:lstStyle/>
+          <a:p>
+            <a:pPr algn="l">
+              <a:spcAft>
+                <a:spcPts val="800"/>
+              </a:spcAft>
+            </a:pPr>
+            <a:r>
+              <a:rPr sz="1300">
+                <a:solidFill>
+                  <a:srgbClr val="4B5563"/>
+                </a:solidFill>
+              </a:rPr>
+              <a:t>본 연구는 단일 deliverable이 아닌 **한국 ESG 공시 검증 인프라 구축의 첫 5년 단계** 위치에서 평가될 수 있다.</a:t>
+            </a:r>
+          </a:p>
+          <a:p>
+            <a:pPr algn="l">
+              <a:spcAft>
+                <a:spcPts val="800"/>
+              </a:spcAft>
+            </a:pPr>
+            <a:r>
+              <a:rPr sz="1400" b="1">
+                <a:solidFill>
+                  <a:srgbClr val="1E3A8A"/>
+                </a:solidFill>
+              </a:rPr>
+              <a:t>Phase 1 (2026-2027) 검증 체계 설계</a:t>
+            </a:r>
+          </a:p>
+          <a:p>
+            <a:pPr algn="l">
+              <a:spcAft>
+                <a:spcPts val="800"/>
+              </a:spcAft>
+            </a:pPr>
+            <a:r>
+              <a:rPr sz="1300">
+                <a:solidFill>
+                  <a:srgbClr val="4B5563"/>
+                </a:solidFill>
+              </a:rPr>
+              <a:t>KSSB 시행령에 GIR-ESG 대조표 첨부 의무화, KEITI DRI 시범 운영, 본 연구 23개사 결과를 reference framework로 제도 도입.</a:t>
+            </a:r>
+          </a:p>
+          <a:p>
+            <a:pPr algn="l">
+              <a:spcAft>
+                <a:spcPts val="800"/>
+              </a:spcAft>
+            </a:pPr>
+            <a:r>
+              <a:rPr sz="1400" b="1">
+                <a:solidFill>
+                  <a:srgbClr val="1E3A8A"/>
+                </a:solidFill>
+              </a:rPr>
+              <a:t>Phase 2 (2028-2029) KSSB 1차 시행</a:t>
+            </a:r>
+          </a:p>
+          <a:p>
+            <a:pPr algn="l">
+              <a:spcAft>
+                <a:spcPts val="800"/>
+              </a:spcAft>
+            </a:pPr>
+            <a:r>
+              <a:rPr sz="1300">
+                <a:solidFill>
+                  <a:srgbClr val="4B5563"/>
+                </a:solidFill>
+              </a:rPr>
+              <a:t>49개사 의무공시 시작, 본 연구 priority_score를 검증 자원 차등 배분 정책으로 활용. Tier 1 firms 외부 현장 검증 의무화.</a:t>
+            </a:r>
+          </a:p>
+          <a:p>
+            <a:pPr algn="l">
+              <a:spcAft>
+                <a:spcPts val="800"/>
+              </a:spcAft>
+            </a:pPr>
+            <a:r>
+              <a:rPr sz="1400" b="1">
+                <a:solidFill>
+                  <a:srgbClr val="1E3A8A"/>
+                </a:solidFill>
+              </a:rPr>
+              <a:t>Phase 3 (2030-2031) 적용 대상 확장</a:t>
+            </a:r>
+          </a:p>
+          <a:p>
+            <a:pPr algn="l">
+              <a:spcAft>
+                <a:spcPts val="800"/>
+              </a:spcAft>
+            </a:pPr>
+            <a:r>
+              <a:rPr sz="1300">
+                <a:solidFill>
+                  <a:srgbClr val="4B5563"/>
+                </a:solidFill>
+              </a:rPr>
+              <a:t>자산 5조원 이상 firms로 확장(약 300개사), 본 연구 자동화 파이프라인이 분석 범위 자동 확장. 위성 SO₂·CO·HCHO 다종 활용 의무 검증.</a:t>
+            </a:r>
+          </a:p>
+          <a:p>
+            <a:pPr algn="l">
+              <a:spcAft>
+                <a:spcPts val="800"/>
+              </a:spcAft>
+            </a:pPr>
+            <a:r>
+              <a:rPr sz="1400" b="1">
+                <a:solidFill>
+                  <a:srgbClr val="1E3A8A"/>
+                </a:solidFill>
+              </a:rPr>
+              <a:t>Phase 4 (2032-2033) 글로벌 표준화</a:t>
+            </a:r>
+          </a:p>
+          <a:p>
+            <a:pPr algn="l">
+              <a:spcAft>
+                <a:spcPts val="800"/>
+              </a:spcAft>
+            </a:pPr>
+            <a:r>
+              <a:rPr sz="1300">
+                <a:solidFill>
+                  <a:srgbClr val="4B5563"/>
+                </a:solidFill>
+              </a:rPr>
+              <a:t>IFRS S2 검증 체계 한국 모형 ISSB 제안. 일본·EU 양자 검증 협력 협정. CBAM 대응 한국 표준 모형 EU와 합의.</a:t>
+            </a:r>
+          </a:p>
+          <a:p>
+            <a:pPr algn="l">
+              <a:spcAft>
+                <a:spcPts val="800"/>
+              </a:spcAft>
+            </a:pPr>
+            <a:r>
+              <a:rPr sz="1400" b="1">
+                <a:solidFill>
+                  <a:srgbClr val="1E3A8A"/>
+                </a:solidFill>
+              </a:rPr>
+              <a:t>Phase 5 (2034-2035) 고해상도 모니터링</a:t>
+            </a:r>
+          </a:p>
+          <a:p>
+            <a:pPr algn="l">
+              <a:spcAft>
+                <a:spcPts val="800"/>
+              </a:spcAft>
+            </a:pPr>
+            <a:r>
+              <a:rPr sz="1300">
+                <a:solidFill>
+                  <a:srgbClr val="4B5563"/>
+                </a:solidFill>
+              </a:rPr>
+              <a:t>Sentinel-4(2025 발사) + GEMS 시간별 firm-level 모니터링 정상화. ML 기반 자동 anomaly alert 시스템 환경부 공식 도구화.</a:t>
+            </a:r>
+          </a:p>
+          <a:p>
+            <a:pPr algn="l">
+              <a:spcAft>
+                <a:spcPts val="800"/>
+              </a:spcAft>
+            </a:pPr>
+            <a:r>
+              <a:rPr sz="1300">
+                <a:solidFill>
+                  <a:srgbClr val="4B5563"/>
+                </a:solidFill>
+              </a:rPr>
+              <a:t>본 연구는 Phase 1의 **가장 구체적이고 즉시 실행 가능한 첫 단계**를 제공한다.</a:t>
+            </a:r>
+          </a:p>
+        </p:txBody>
+      </p:sp>
+    </p:spTree>
+  </p:cSld>
+  <p:clrMapOvr>
+    <a:masterClrMapping/>
+  </p:clrMapOvr>
+</p:sld>
+</file>
+
+<file path=ppt/slides/slide14.xml><?xml version="1.0" encoding="utf-8"?>
+<p:sld xmlns:a="http://schemas.openxmlformats.org/drawingml/2006/main" xmlns:p="http://schemas.openxmlformats.org/presentationml/2006/main" xmlns:r="http://schemas.openxmlformats.org/officeDocument/2006/relationships">
+  <p:cSld>
+    <p:spTree>
+      <p:nvGrpSpPr>
+        <p:cNvPr id="1" name=""/>
+        <p:cNvGrpSpPr/>
+        <p:nvPr/>
+      </p:nvGrpSpPr>
+      <p:grpSpPr/>
+      <p:sp>
+        <p:nvSpPr>
+          <p:cNvPr id="2" name="Rectangle 1"/>
+          <p:cNvSpPr/>
+          <p:nvPr/>
+        </p:nvSpPr>
+        <p:spPr>
+          <a:xfrm>
+            <a:off x="0" y="0"/>
+            <a:ext cx="12188952" cy="6858000"/>
+          </a:xfrm>
+          <a:prstGeom prst="rect">
+            <a:avLst/>
+          </a:prstGeom>
+          <a:solidFill>
+            <a:srgbClr val="FAFAF7"/>
+          </a:solidFill>
+          <a:ln>
+            <a:noFill/>
+          </a:ln>
+        </p:spPr>
+        <p:style>
+          <a:lnRef idx="1">
+            <a:schemeClr val="accent1"/>
+          </a:lnRef>
+          <a:fillRef idx="3">
+            <a:schemeClr val="accent1"/>
+          </a:fillRef>
+          <a:effectRef idx="2">
+            <a:schemeClr val="accent1"/>
+          </a:effectRef>
+          <a:fontRef idx="minor">
+            <a:schemeClr val="lt1"/>
+          </a:fontRef>
+        </p:style>
+        <p:txBody>
+          <a:bodyPr rtlCol="0" anchor="ctr"/>
+          <a:lstStyle/>
+          <a:p>
+            <a:pPr algn="ctr"/>
+          </a:p>
+        </p:txBody>
+      </p:sp>
+      <p:sp>
+        <p:nvSpPr>
+          <p:cNvPr id="3" name="TextBox 2"/>
+          <p:cNvSpPr txBox="1"/>
+          <p:nvPr/>
+        </p:nvSpPr>
+        <p:spPr>
+          <a:xfrm>
+            <a:off x="457200" y="274320"/>
+            <a:ext cx="11247120" cy="640080"/>
+          </a:xfrm>
+          <a:prstGeom prst="rect">
+            <a:avLst/>
+          </a:prstGeom>
+          <a:noFill/>
+        </p:spPr>
+        <p:txBody>
+          <a:bodyPr wrap="none">
+            <a:spAutoFit/>
+          </a:bodyPr>
+          <a:lstStyle/>
+          <a:p>
+            <a:r>
+              <a:rPr sz="2400" b="1">
+                <a:solidFill>
+                  <a:srgbClr val="1F2937"/>
+                </a:solidFill>
+              </a:rPr>
+              <a:t>본 연구의 학술적·정책적 기여 요약</a:t>
+            </a:r>
+          </a:p>
+        </p:txBody>
+      </p:sp>
+      <p:sp>
+        <p:nvSpPr>
+          <p:cNvPr id="4" name="Rectangle 3"/>
+          <p:cNvSpPr/>
+          <p:nvPr/>
+        </p:nvSpPr>
+        <p:spPr>
+          <a:xfrm>
+            <a:off x="457200" y="960120"/>
+            <a:ext cx="1097280" cy="40000"/>
+          </a:xfrm>
+          <a:prstGeom prst="rect">
+            <a:avLst/>
+          </a:prstGeom>
+          <a:solidFill>
+            <a:srgbClr val="1E3A8A"/>
+          </a:solidFill>
+          <a:ln>
+            <a:noFill/>
+          </a:ln>
+        </p:spPr>
+        <p:style>
+          <a:lnRef idx="1">
+            <a:schemeClr val="accent1"/>
+          </a:lnRef>
+          <a:fillRef idx="3">
+            <a:schemeClr val="accent1"/>
+          </a:fillRef>
+          <a:effectRef idx="2">
+            <a:schemeClr val="accent1"/>
+          </a:effectRef>
+          <a:fontRef idx="minor">
+            <a:schemeClr val="lt1"/>
+          </a:fontRef>
+        </p:style>
+        <p:txBody>
+          <a:bodyPr rtlCol="0" anchor="ctr"/>
+          <a:lstStyle/>
+          <a:p>
+            <a:pPr algn="ctr"/>
+          </a:p>
+        </p:txBody>
+      </p:sp>
+      <p:sp>
+        <p:nvSpPr>
+          <p:cNvPr id="5" name="TextBox 4"/>
+          <p:cNvSpPr txBox="1"/>
+          <p:nvPr/>
+        </p:nvSpPr>
+        <p:spPr>
+          <a:xfrm>
+            <a:off x="457200" y="1188720"/>
+            <a:ext cx="11247120" cy="5120640"/>
+          </a:xfrm>
+          <a:prstGeom prst="rect">
+            <a:avLst/>
+          </a:prstGeom>
+          <a:noFill/>
+        </p:spPr>
+        <p:txBody>
+          <a:bodyPr wrap="square" lIns="0" rIns="0">
+            <a:spAutoFit/>
+          </a:bodyPr>
+          <a:lstStyle/>
+          <a:p>
+            <a:pPr algn="l">
+              <a:spcAft>
+                <a:spcPts val="800"/>
+              </a:spcAft>
+            </a:pPr>
+            <a:r>
+              <a:rPr sz="1400" b="1">
+                <a:solidFill>
+                  <a:srgbClr val="1E3A8A"/>
+                </a:solidFill>
+              </a:rPr>
+              <a:t>학술적 기여</a:t>
+            </a:r>
+          </a:p>
+          <a:p>
+            <a:pPr algn="l">
+              <a:spcAft>
+                <a:spcPts val="800"/>
+              </a:spcAft>
+            </a:pPr>
+            <a:r>
+              <a:rPr sz="1300">
+                <a:solidFill>
+                  <a:srgbClr val="4B5563"/>
+                </a:solidFill>
+              </a:rPr>
+              <a:t>(1) 한국 코스피 firm-level GIR-ESG-위성-ODIAC 4중 비교 최초 적용
+(2) ERA5 다중회귀 잔차 + Mann-Kendall τ 기반 새로운 4채널 패턴 분류 체계
+(3) IF + LOF + KCGS supervised label 결합 부분 지도학습 이상탐지
+(4) Heckman 2-stage IMR 통제 + Bootstrap B=2000 firm-block CI 학술 표준 준수
+(5) SHAP 'interventional' XAI 설명력 제공
+(6) 자동화 ESG PDF 파싱 + GEE 위성 추출 파이프라인 영구 시스템화</a:t>
+            </a:r>
+          </a:p>
+          <a:p>
+            <a:pPr algn="l">
+              <a:spcAft>
+                <a:spcPts val="800"/>
+              </a:spcAft>
+            </a:pPr>
+            <a:r>
+              <a:rPr sz="1400" b="1">
+                <a:solidFill>
+                  <a:srgbClr val="1E3A8A"/>
+                </a:solidFill>
+              </a:rPr>
+              <a:t>정책적 기여</a:t>
+            </a:r>
+          </a:p>
+          <a:p>
+            <a:pPr algn="l">
+              <a:spcAft>
+                <a:spcPts val="800"/>
+              </a:spcAft>
+            </a:pPr>
+            <a:r>
+              <a:rPr sz="1300">
+                <a:solidFill>
+                  <a:srgbClr val="4B5563"/>
+                </a:solidFill>
+              </a:rPr>
+              <a:t>(1) KSSB 2028 의무공시 시행 직전 검증 프레임워크 즉시 활용 가능
+(2) 패턴 D 2건(POSCO·삼성전자) 검증 우선순위 1순위 식별
+(3) KEITI DRI 신뢰성 지수 산식 제안
+(4) 환경부·검증기관 자원 차등 배분 매트릭스 (47% 비용 절감 추정)
+(5) KSSB 제2호 시행령 4가지 요건 권고 (대조표 첨부, 위성 연계, 차등 검증, 경계 변경 공개)
+(6) Gold 23개사 = KSSB 1차 적용 대상과 직접 교집합 → 즉시 정책 자원</a:t>
+            </a:r>
+          </a:p>
+          <a:p>
+            <a:pPr algn="l">
+              <a:spcAft>
+                <a:spcPts val="800"/>
+              </a:spcAft>
+            </a:pPr>
+            <a:r>
+              <a:rPr sz="1400" b="1">
+                <a:solidFill>
+                  <a:srgbClr val="1E3A8A"/>
+                </a:solidFill>
+              </a:rPr>
+              <a:t>산업·시민 기여</a:t>
+            </a:r>
+          </a:p>
+          <a:p>
+            <a:pPr algn="l">
+              <a:spcAft>
+                <a:spcPts val="800"/>
+              </a:spcAft>
+            </a:pPr>
+            <a:r>
+              <a:rPr sz="1300">
+                <a:solidFill>
+                  <a:srgbClr val="4B5563"/>
+                </a:solidFill>
+              </a:rPr>
+              <a:t>투자자: 객관적 ESG 신뢰성 지수 / 시민: ESG 보고의 검증 가능성 향상 / 기업: 검증 우선순위 사전 인지로 투명성 유인.</a:t>
+            </a:r>
+          </a:p>
+        </p:txBody>
+      </p:sp>
+    </p:spTree>
+  </p:cSld>
+  <p:clrMapOvr>
+    <a:masterClrMapping/>
+  </p:clrMapOvr>
+</p:sld>
+</file>
+
+<file path=ppt/slides/slide15.xml><?xml version="1.0" encoding="utf-8"?>
+<p:sld xmlns:a="http://schemas.openxmlformats.org/drawingml/2006/main" xmlns:p="http://schemas.openxmlformats.org/presentationml/2006/main" xmlns:r="http://schemas.openxmlformats.org/officeDocument/2006/relationships">
+  <p:cSld>
+    <p:spTree>
+      <p:nvGrpSpPr>
+        <p:cNvPr id="1" name=""/>
+        <p:cNvGrpSpPr/>
+        <p:nvPr/>
+      </p:nvGrpSpPr>
+      <p:grpSpPr/>
+      <p:sp>
+        <p:nvSpPr>
+          <p:cNvPr id="2" name="Rectangle 1"/>
+          <p:cNvSpPr/>
+          <p:nvPr/>
+        </p:nvSpPr>
+        <p:spPr>
+          <a:xfrm>
+            <a:off x="0" y="0"/>
+            <a:ext cx="12188952" cy="6858000"/>
+          </a:xfrm>
+          <a:prstGeom prst="rect">
+            <a:avLst/>
+          </a:prstGeom>
+          <a:solidFill>
+            <a:srgbClr val="FAFAF7"/>
+          </a:solidFill>
+          <a:ln>
+            <a:noFill/>
+          </a:ln>
+        </p:spPr>
+        <p:style>
+          <a:lnRef idx="1">
+            <a:schemeClr val="accent1"/>
+          </a:lnRef>
+          <a:fillRef idx="3">
+            <a:schemeClr val="accent1"/>
+          </a:fillRef>
+          <a:effectRef idx="2">
+            <a:schemeClr val="accent1"/>
+          </a:effectRef>
+          <a:fontRef idx="minor">
+            <a:schemeClr val="lt1"/>
+          </a:fontRef>
+        </p:style>
+        <p:txBody>
+          <a:bodyPr rtlCol="0" anchor="ctr"/>
+          <a:lstStyle/>
+          <a:p>
+            <a:pPr algn="ctr"/>
+          </a:p>
+        </p:txBody>
+      </p:sp>
+      <p:sp>
+        <p:nvSpPr>
+          <p:cNvPr id="3" name="TextBox 2"/>
+          <p:cNvSpPr txBox="1"/>
+          <p:nvPr/>
+        </p:nvSpPr>
+        <p:spPr>
+          <a:xfrm>
+            <a:off x="457200" y="274320"/>
+            <a:ext cx="11247120" cy="640080"/>
+          </a:xfrm>
+          <a:prstGeom prst="rect">
+            <a:avLst/>
+          </a:prstGeom>
+          <a:noFill/>
+        </p:spPr>
+        <p:txBody>
+          <a:bodyPr wrap="none">
+            <a:spAutoFit/>
+          </a:bodyPr>
+          <a:lstStyle/>
+          <a:p>
+            <a:r>
+              <a:rPr sz="2400" b="1">
+                <a:solidFill>
+                  <a:srgbClr val="1F2937"/>
+                </a:solidFill>
+              </a:rPr>
               <a:t>결론 — 검증 체계 설계의 골든 타임</a:t>
             </a:r>
           </a:p>
@@ -5081,7 +5984,7 @@
                   <a:srgbClr val="9CA3AF"/>
                 </a:solidFill>
               </a:rPr>
-              <a:t>4 / 12</a:t>
+              <a:t>4 / 15</a:t>
             </a:r>
           </a:p>
         </p:txBody>
@@ -6093,7 +6996,7 @@
                   <a:srgbClr val="9CA3AF"/>
                 </a:solidFill>
               </a:rPr>
-              <a:t>7 / 12</a:t>
+              <a:t>7 / 15</a:t>
             </a:r>
           </a:p>
         </p:txBody>
@@ -6499,7 +7402,7 @@
                   <a:srgbClr val="9CA3AF"/>
                 </a:solidFill>
               </a:rPr>
-              <a:t>8 / 12</a:t>
+              <a:t>8 / 15</a:t>
             </a:r>
           </a:p>
         </p:txBody>
